--- a/output/combat-mindset-onepager.pptx
+++ b/output/combat-mindset-onepager.pptx
@@ -3807,7 +3807,7 @@
         <p:spPr>
           <a:xfrm>
             <a:off x="521208" y="5852160"/>
-            <a:ext cx="11155680" cy="182880"/>
+            <a:ext cx="5486400" cy="182880"/>
           </a:xfrm>
           <a:prstGeom prst="rect">
             <a:avLst/>
@@ -3839,7 +3839,46 @@
       </p:sp>
       <p:sp>
         <p:nvSpPr>
-          <p:cNvPr id="92" name="Shape 89"/>
+          <p:cNvPr id="92" name="Text 89"/>
+          <p:cNvSpPr/>
+          <p:nvPr/>
+        </p:nvSpPr>
+        <p:spPr>
+          <a:xfrm>
+            <a:off x="5989320" y="5852160"/>
+            <a:ext cx="5687568" cy="182880"/>
+          </a:xfrm>
+          <a:prstGeom prst="rect">
+            <a:avLst/>
+          </a:prstGeom>
+          <a:noFill/>
+          <a:ln/>
+        </p:spPr>
+        <p:txBody>
+          <a:bodyPr wrap="square" lIns="0" tIns="0" rIns="0" bIns="0" rtlCol="0" anchor="ctr"/>
+          <a:lstStyle/>
+          <a:p>
+            <a:pPr algn="r" indent="0" marL="0">
+              <a:buNone/>
+            </a:pPr>
+            <a:r>
+              <a:rPr lang="en-US" sz="720" i="1" dirty="0">
+                <a:solidFill>
+                  <a:srgbClr val="CDD2B7"/>
+                </a:solidFill>
+                <a:latin typeface="Arial" pitchFamily="34" charset="0"/>
+                <a:ea typeface="Arial" pitchFamily="34" charset="-122"/>
+                <a:cs typeface="Arial" pitchFamily="34" charset="-120"/>
+              </a:rPr>
+              <a:t>each product contributes across multiple strands — columns do not pair one-to-one</a:t>
+            </a:r>
+            <a:endParaRPr lang="en-US" sz="720" dirty="0"/>
+          </a:p>
+        </p:txBody>
+      </p:sp>
+      <p:sp>
+        <p:nvSpPr>
+          <p:cNvPr id="93" name="Shape 90"/>
           <p:cNvSpPr/>
           <p:nvPr/>
         </p:nvSpPr>
@@ -3864,7 +3903,7 @@
       </p:sp>
       <p:sp>
         <p:nvSpPr>
-          <p:cNvPr id="93" name="Text 90"/>
+          <p:cNvPr id="94" name="Text 91"/>
           <p:cNvSpPr/>
           <p:nvPr/>
         </p:nvSpPr>
@@ -3903,7 +3942,7 @@
       </p:sp>
       <p:sp>
         <p:nvSpPr>
-          <p:cNvPr id="94" name="Shape 91"/>
+          <p:cNvPr id="95" name="Shape 92"/>
           <p:cNvSpPr/>
           <p:nvPr/>
         </p:nvSpPr>
@@ -3928,7 +3967,7 @@
       </p:sp>
       <p:sp>
         <p:nvSpPr>
-          <p:cNvPr id="95" name="Text 92"/>
+          <p:cNvPr id="96" name="Text 93"/>
           <p:cNvSpPr/>
           <p:nvPr/>
         </p:nvSpPr>
@@ -3967,7 +4006,7 @@
       </p:sp>
       <p:sp>
         <p:nvSpPr>
-          <p:cNvPr id="96" name="Shape 93"/>
+          <p:cNvPr id="97" name="Shape 94"/>
           <p:cNvSpPr/>
           <p:nvPr/>
         </p:nvSpPr>
@@ -3992,7 +4031,7 @@
       </p:sp>
       <p:sp>
         <p:nvSpPr>
-          <p:cNvPr id="97" name="Text 94"/>
+          <p:cNvPr id="98" name="Text 95"/>
           <p:cNvSpPr/>
           <p:nvPr/>
         </p:nvSpPr>
@@ -4048,7 +4087,7 @@
       </p:sp>
       <p:sp>
         <p:nvSpPr>
-          <p:cNvPr id="98" name="Shape 95"/>
+          <p:cNvPr id="99" name="Shape 96"/>
           <p:cNvSpPr/>
           <p:nvPr/>
         </p:nvSpPr>
@@ -4073,7 +4112,7 @@
       </p:sp>
       <p:sp>
         <p:nvSpPr>
-          <p:cNvPr id="99" name="Text 96"/>
+          <p:cNvPr id="100" name="Text 97"/>
           <p:cNvSpPr/>
           <p:nvPr/>
         </p:nvSpPr>
@@ -4112,7 +4151,7 @@
       </p:sp>
       <p:sp>
         <p:nvSpPr>
-          <p:cNvPr id="100" name="Shape 97"/>
+          <p:cNvPr id="101" name="Shape 98"/>
           <p:cNvSpPr/>
           <p:nvPr/>
         </p:nvSpPr>
@@ -4137,7 +4176,7 @@
       </p:sp>
       <p:sp>
         <p:nvSpPr>
-          <p:cNvPr id="101" name="Text 98"/>
+          <p:cNvPr id="102" name="Text 99"/>
           <p:cNvSpPr/>
           <p:nvPr/>
         </p:nvSpPr>
@@ -4176,7 +4215,7 @@
       </p:sp>
       <p:sp>
         <p:nvSpPr>
-          <p:cNvPr id="102" name="Shape 99"/>
+          <p:cNvPr id="103" name="Shape 100"/>
           <p:cNvSpPr/>
           <p:nvPr/>
         </p:nvSpPr>
@@ -4201,7 +4240,7 @@
       </p:sp>
       <p:sp>
         <p:nvSpPr>
-          <p:cNvPr id="103" name="Text 100"/>
+          <p:cNvPr id="104" name="Text 101"/>
           <p:cNvSpPr/>
           <p:nvPr/>
         </p:nvSpPr>
@@ -4240,7 +4279,7 @@
       </p:sp>
       <p:sp>
         <p:nvSpPr>
-          <p:cNvPr id="104" name="Shape 101"/>
+          <p:cNvPr id="105" name="Shape 102"/>
           <p:cNvSpPr/>
           <p:nvPr/>
         </p:nvSpPr>
@@ -4265,7 +4304,7 @@
       </p:sp>
       <p:sp>
         <p:nvSpPr>
-          <p:cNvPr id="105" name="Text 102"/>
+          <p:cNvPr id="106" name="Text 103"/>
           <p:cNvSpPr/>
           <p:nvPr/>
         </p:nvSpPr>
@@ -4304,7 +4343,7 @@
       </p:sp>
       <p:sp>
         <p:nvSpPr>
-          <p:cNvPr id="106" name="Shape 103"/>
+          <p:cNvPr id="107" name="Shape 104"/>
           <p:cNvSpPr/>
           <p:nvPr/>
         </p:nvSpPr>
@@ -4328,7 +4367,7 @@
       </p:sp>
       <p:sp>
         <p:nvSpPr>
-          <p:cNvPr id="107" name="Text 104"/>
+          <p:cNvPr id="108" name="Text 105"/>
           <p:cNvSpPr/>
           <p:nvPr/>
         </p:nvSpPr>
@@ -4359,7 +4398,7 @@
                 <a:ea typeface="Arial" pitchFamily="34" charset="-122"/>
                 <a:cs typeface="Arial" pitchFamily="34" charset="-120"/>
               </a:rPr>
-              <a:t>COGCON develops selected elements of Performance Under Pressure — not a complete Combat Mindset programme or a validated operational-readiness measure.</a:t>
+              <a:t>COGCON MVP is nested within the performance-cognition strand (dashed link). It develops selected elements of Performance Under Pressure — not a complete Combat Mindset programme or a validated operational-readiness measure.</a:t>
             </a:r>
             <a:endParaRPr lang="en-US" sz="680" dirty="0"/>
           </a:p>
@@ -4367,7 +4406,7 @@
       </p:sp>
       <p:sp>
         <p:nvSpPr>
-          <p:cNvPr id="108" name="Text 105"/>
+          <p:cNvPr id="109" name="Text 106"/>
           <p:cNvSpPr/>
           <p:nvPr/>
         </p:nvSpPr>

--- a/output/combat-mindset-onepager.pptx
+++ b/output/combat-mindset-onepager.pptx
@@ -1026,7 +1026,7 @@
                 <a:ea typeface="Arial" pitchFamily="34" charset="-122"/>
                 <a:cs typeface="Arial" pitchFamily="34" charset="-120"/>
               </a:rPr>
-              <a:t>NZALC / Human Performance Cell   ·   NZALC/HPC 2026   ·   Draft v0.3   ·   July 2026</a:t>
+              <a:t>NZALC / Human Performance Cell   ·   NZALC/HPC 2026   ·   Draft v0.4   ·   July 2026</a:t>
             </a:r>
             <a:endParaRPr lang="en-US" sz="650" dirty="0"/>
           </a:p>
@@ -2206,7 +2206,7 @@
                 <a:ea typeface="Arial" pitchFamily="34" charset="-122"/>
                 <a:cs typeface="Arial" pitchFamily="34" charset="-120"/>
               </a:rPr>
-              <a:t>Organises:  definitions  ·  desired outcomes  ·  capability strands  ·  developmental progression  ·  products and methods  ·  delivery  ·  governance  ·  evidence  ·  assurance</a:t>
+              <a:t>Organises:  definitions  ·  desired outcomes  ·  capability pillars  ·  developmental progression  ·  products and methods  ·  delivery  ·  governance  ·  evidence  ·  assurance</a:t>
             </a:r>
             <a:endParaRPr lang="en-US" sz="750" dirty="0"/>
           </a:p>
@@ -2819,7 +2819,7 @@
         <p:spPr>
           <a:xfrm>
             <a:off x="7699248" y="3566160"/>
-            <a:ext cx="624840" cy="219456"/>
+            <a:ext cx="758952" cy="219456"/>
           </a:xfrm>
           <a:prstGeom prst="chevron">
             <a:avLst/>
@@ -2839,7 +2839,7 @@
         <p:spPr>
           <a:xfrm>
             <a:off x="7699248" y="3566160"/>
-            <a:ext cx="624840" cy="219456"/>
+            <a:ext cx="758952" cy="219456"/>
           </a:xfrm>
           <a:prstGeom prst="rect">
             <a:avLst/>
@@ -2877,8 +2877,8 @@
         </p:nvSpPr>
         <p:spPr>
           <a:xfrm>
-            <a:off x="8369808" y="3566160"/>
-            <a:ext cx="624840" cy="219456"/>
+            <a:off x="8503920" y="3566160"/>
+            <a:ext cx="758952" cy="219456"/>
           </a:xfrm>
           <a:prstGeom prst="chevron">
             <a:avLst/>
@@ -2897,8 +2897,8 @@
         </p:nvSpPr>
         <p:spPr>
           <a:xfrm>
-            <a:off x="8369808" y="3566160"/>
-            <a:ext cx="624840" cy="219456"/>
+            <a:off x="8503920" y="3566160"/>
+            <a:ext cx="758952" cy="219456"/>
           </a:xfrm>
           <a:prstGeom prst="rect">
             <a:avLst/>
@@ -2936,8 +2936,8 @@
         </p:nvSpPr>
         <p:spPr>
           <a:xfrm>
-            <a:off x="9040368" y="3566160"/>
-            <a:ext cx="624840" cy="219456"/>
+            <a:off x="9308592" y="3566160"/>
+            <a:ext cx="758952" cy="219456"/>
           </a:xfrm>
           <a:prstGeom prst="chevron">
             <a:avLst/>
@@ -2956,8 +2956,8 @@
         </p:nvSpPr>
         <p:spPr>
           <a:xfrm>
-            <a:off x="9040368" y="3566160"/>
-            <a:ext cx="624840" cy="219456"/>
+            <a:off x="9308592" y="3566160"/>
+            <a:ext cx="758952" cy="219456"/>
           </a:xfrm>
           <a:prstGeom prst="rect">
             <a:avLst/>
@@ -2995,8 +2995,8 @@
         </p:nvSpPr>
         <p:spPr>
           <a:xfrm>
-            <a:off x="9710928" y="3566160"/>
-            <a:ext cx="624840" cy="219456"/>
+            <a:off x="10113264" y="3566160"/>
+            <a:ext cx="758952" cy="219456"/>
           </a:xfrm>
           <a:prstGeom prst="chevron">
             <a:avLst/>
@@ -3015,8 +3015,8 @@
         </p:nvSpPr>
         <p:spPr>
           <a:xfrm>
-            <a:off x="9710928" y="3566160"/>
-            <a:ext cx="624840" cy="219456"/>
+            <a:off x="10113264" y="3566160"/>
+            <a:ext cx="758952" cy="219456"/>
           </a:xfrm>
           <a:prstGeom prst="rect">
             <a:avLst/>
@@ -3054,21 +3054,16 @@
         </p:nvSpPr>
         <p:spPr>
           <a:xfrm>
-            <a:off x="10381488" y="3566160"/>
-            <a:ext cx="624840" cy="219456"/>
+            <a:off x="10917936" y="3566160"/>
+            <a:ext cx="758952" cy="219456"/>
           </a:xfrm>
           <a:prstGeom prst="chevron">
             <a:avLst/>
           </a:prstGeom>
           <a:solidFill>
-            <a:srgbClr val="FFFFFF"/>
-          </a:solidFill>
-          <a:ln w="12700">
-            <a:solidFill>
-              <a:srgbClr val="3A4B00"/>
-            </a:solidFill>
-            <a:prstDash val="solid"/>
-          </a:ln>
+            <a:srgbClr val="3A4B00"/>
+          </a:solidFill>
+          <a:ln/>
         </p:spPr>
       </p:sp>
       <p:sp>
@@ -3079,8 +3074,8 @@
         </p:nvSpPr>
         <p:spPr>
           <a:xfrm>
-            <a:off x="10381488" y="3566160"/>
-            <a:ext cx="624840" cy="219456"/>
+            <a:off x="10917936" y="3566160"/>
+            <a:ext cx="758952" cy="219456"/>
           </a:xfrm>
           <a:prstGeom prst="rect">
             <a:avLst/>
@@ -3098,13 +3093,13 @@
             <a:r>
               <a:rPr lang="en-US" sz="680" b="1" dirty="0">
                 <a:solidFill>
-                  <a:srgbClr val="3A4B00"/>
-                </a:solidFill>
-                <a:latin typeface="Arial" pitchFamily="34" charset="0"/>
-                <a:ea typeface="Arial" pitchFamily="34" charset="-122"/>
-                <a:cs typeface="Arial" pitchFamily="34" charset="-120"/>
-              </a:rPr>
-              <a:t>TRIAL</a:t>
+                  <a:srgbClr val="FFFFFF"/>
+                </a:solidFill>
+                <a:latin typeface="Arial" pitchFamily="34" charset="0"/>
+                <a:ea typeface="Arial" pitchFamily="34" charset="-122"/>
+                <a:cs typeface="Arial" pitchFamily="34" charset="-120"/>
+              </a:rPr>
+              <a:t>REPORT</a:t>
             </a:r>
             <a:endParaRPr lang="en-US" sz="680" dirty="0"/>
           </a:p>
@@ -3112,66 +3107,7 @@
       </p:sp>
       <p:sp>
         <p:nvSpPr>
-          <p:cNvPr id="68" name="Shape 65"/>
-          <p:cNvSpPr/>
-          <p:nvPr/>
-        </p:nvSpPr>
-        <p:spPr>
-          <a:xfrm>
-            <a:off x="11052048" y="3566160"/>
-            <a:ext cx="624840" cy="219456"/>
-          </a:xfrm>
-          <a:prstGeom prst="chevron">
-            <a:avLst/>
-          </a:prstGeom>
-          <a:solidFill>
-            <a:srgbClr val="3A4B00"/>
-          </a:solidFill>
-          <a:ln/>
-        </p:spPr>
-      </p:sp>
-      <p:sp>
-        <p:nvSpPr>
-          <p:cNvPr id="69" name="Text 66"/>
-          <p:cNvSpPr/>
-          <p:nvPr/>
-        </p:nvSpPr>
-        <p:spPr>
-          <a:xfrm>
-            <a:off x="11052048" y="3566160"/>
-            <a:ext cx="624840" cy="219456"/>
-          </a:xfrm>
-          <a:prstGeom prst="rect">
-            <a:avLst/>
-          </a:prstGeom>
-          <a:noFill/>
-          <a:ln/>
-        </p:spPr>
-        <p:txBody>
-          <a:bodyPr wrap="square" lIns="0" tIns="0" rIns="0" bIns="0" rtlCol="0" anchor="ctr"/>
-          <a:lstStyle/>
-          <a:p>
-            <a:pPr algn="ctr" indent="0" marL="0">
-              <a:buNone/>
-            </a:pPr>
-            <a:r>
-              <a:rPr lang="en-US" sz="680" b="1" dirty="0">
-                <a:solidFill>
-                  <a:srgbClr val="FFFFFF"/>
-                </a:solidFill>
-                <a:latin typeface="Arial" pitchFamily="34" charset="0"/>
-                <a:ea typeface="Arial" pitchFamily="34" charset="-122"/>
-                <a:cs typeface="Arial" pitchFamily="34" charset="-120"/>
-              </a:rPr>
-              <a:t>REPORT</a:t>
-            </a:r>
-            <a:endParaRPr lang="en-US" sz="680" dirty="0"/>
-          </a:p>
-        </p:txBody>
-      </p:sp>
-      <p:sp>
-        <p:nvSpPr>
-          <p:cNvPr id="70" name="Text 67"/>
+          <p:cNvPr id="68" name="Text 65"/>
           <p:cNvSpPr/>
           <p:nvPr/>
         </p:nvSpPr>
@@ -3202,7 +3138,7 @@
                 <a:ea typeface="Arial" pitchFamily="34" charset="-122"/>
                 <a:cs typeface="Arial" pitchFamily="34" charset="-120"/>
               </a:rPr>
-              <a:t>Phase 4 is a limited COGCON MVP integration trial, subject to capacity. Report back November 2026: Framework v1.0, capability and product map, implementation plan.</a:t>
+              <a:t>COGCON’s completed feasibility trials enter Phase 1 as mapped evidence. Report back November 2026: Framework v1.0, capability and product map, implementation plan.</a:t>
             </a:r>
             <a:endParaRPr lang="en-US" sz="730" dirty="0"/>
           </a:p>
@@ -3210,7 +3146,7 @@
       </p:sp>
       <p:sp>
         <p:nvSpPr>
-          <p:cNvPr id="71" name="Shape 68"/>
+          <p:cNvPr id="69" name="Shape 66"/>
           <p:cNvSpPr/>
           <p:nvPr/>
         </p:nvSpPr>
@@ -3230,7 +3166,7 @@
       </p:sp>
       <p:sp>
         <p:nvSpPr>
-          <p:cNvPr id="72" name="Text 69"/>
+          <p:cNvPr id="70" name="Text 67"/>
           <p:cNvSpPr/>
           <p:nvPr/>
         </p:nvSpPr>
@@ -3269,7 +3205,7 @@
       </p:sp>
       <p:sp>
         <p:nvSpPr>
-          <p:cNvPr id="73" name="Text 70"/>
+          <p:cNvPr id="71" name="Text 68"/>
           <p:cNvSpPr/>
           <p:nvPr/>
         </p:nvSpPr>
@@ -3308,7 +3244,7 @@
       </p:sp>
       <p:sp>
         <p:nvSpPr>
-          <p:cNvPr id="74" name="Shape 71"/>
+          <p:cNvPr id="72" name="Shape 69"/>
           <p:cNvSpPr/>
           <p:nvPr/>
         </p:nvSpPr>
@@ -3328,7 +3264,7 @@
       </p:sp>
       <p:sp>
         <p:nvSpPr>
-          <p:cNvPr id="75" name="Text 72"/>
+          <p:cNvPr id="73" name="Text 70"/>
           <p:cNvSpPr/>
           <p:nvPr/>
         </p:nvSpPr>
@@ -3359,7 +3295,7 @@
                 <a:ea typeface="Arial" pitchFamily="34" charset="-122"/>
                 <a:cs typeface="Arial" pitchFamily="34" charset="-120"/>
               </a:rPr>
-              <a:t>CAPABILITY STRANDS — WHAT WE BUILD</a:t>
+              <a:t>CAPABILITY PILLARS — WHAT WE BUILD</a:t>
             </a:r>
             <a:endParaRPr lang="en-US" sz="850" dirty="0"/>
           </a:p>
@@ -3367,7 +3303,7 @@
       </p:sp>
       <p:sp>
         <p:nvSpPr>
-          <p:cNvPr id="76" name="Shape 73"/>
+          <p:cNvPr id="74" name="Shape 71"/>
           <p:cNvSpPr/>
           <p:nvPr/>
         </p:nvSpPr>
@@ -3387,7 +3323,7 @@
       </p:sp>
       <p:sp>
         <p:nvSpPr>
-          <p:cNvPr id="77" name="Text 74"/>
+          <p:cNvPr id="75" name="Text 72"/>
           <p:cNvSpPr/>
           <p:nvPr/>
         </p:nvSpPr>
@@ -3426,7 +3362,7 @@
       </p:sp>
       <p:sp>
         <p:nvSpPr>
-          <p:cNvPr id="78" name="Shape 75"/>
+          <p:cNvPr id="76" name="Shape 73"/>
           <p:cNvSpPr/>
           <p:nvPr/>
         </p:nvSpPr>
@@ -3446,7 +3382,7 @@
       </p:sp>
       <p:sp>
         <p:nvSpPr>
-          <p:cNvPr id="79" name="Text 76"/>
+          <p:cNvPr id="77" name="Text 74"/>
           <p:cNvSpPr/>
           <p:nvPr/>
         </p:nvSpPr>
@@ -3485,7 +3421,7 @@
       </p:sp>
       <p:sp>
         <p:nvSpPr>
-          <p:cNvPr id="80" name="Shape 77"/>
+          <p:cNvPr id="78" name="Shape 75"/>
           <p:cNvSpPr/>
           <p:nvPr/>
         </p:nvSpPr>
@@ -3505,7 +3441,7 @@
       </p:sp>
       <p:sp>
         <p:nvSpPr>
-          <p:cNvPr id="81" name="Text 78"/>
+          <p:cNvPr id="79" name="Text 76"/>
           <p:cNvSpPr/>
           <p:nvPr/>
         </p:nvSpPr>
@@ -3544,7 +3480,7 @@
       </p:sp>
       <p:sp>
         <p:nvSpPr>
-          <p:cNvPr id="82" name="Shape 79"/>
+          <p:cNvPr id="80" name="Shape 77"/>
           <p:cNvSpPr/>
           <p:nvPr/>
         </p:nvSpPr>
@@ -3564,7 +3500,7 @@
       </p:sp>
       <p:sp>
         <p:nvSpPr>
-          <p:cNvPr id="83" name="Text 80"/>
+          <p:cNvPr id="81" name="Text 78"/>
           <p:cNvSpPr/>
           <p:nvPr/>
         </p:nvSpPr>
@@ -3603,7 +3539,7 @@
       </p:sp>
       <p:sp>
         <p:nvSpPr>
-          <p:cNvPr id="84" name="Shape 81"/>
+          <p:cNvPr id="82" name="Shape 79"/>
           <p:cNvSpPr/>
           <p:nvPr/>
         </p:nvSpPr>
@@ -3623,7 +3559,7 @@
       </p:sp>
       <p:sp>
         <p:nvSpPr>
-          <p:cNvPr id="85" name="Text 82"/>
+          <p:cNvPr id="83" name="Text 80"/>
           <p:cNvSpPr/>
           <p:nvPr/>
         </p:nvSpPr>
@@ -3662,7 +3598,7 @@
       </p:sp>
       <p:sp>
         <p:nvSpPr>
-          <p:cNvPr id="86" name="Shape 83"/>
+          <p:cNvPr id="84" name="Shape 81"/>
           <p:cNvSpPr/>
           <p:nvPr/>
         </p:nvSpPr>
@@ -3682,7 +3618,7 @@
       </p:sp>
       <p:sp>
         <p:nvSpPr>
-          <p:cNvPr id="87" name="Text 84"/>
+          <p:cNvPr id="85" name="Text 82"/>
           <p:cNvSpPr/>
           <p:nvPr/>
         </p:nvSpPr>
@@ -3721,7 +3657,7 @@
       </p:sp>
       <p:sp>
         <p:nvSpPr>
-          <p:cNvPr id="88" name="Shape 85"/>
+          <p:cNvPr id="86" name="Shape 83"/>
           <p:cNvSpPr/>
           <p:nvPr/>
         </p:nvSpPr>
@@ -3741,7 +3677,7 @@
       </p:sp>
       <p:sp>
         <p:nvSpPr>
-          <p:cNvPr id="89" name="Text 86"/>
+          <p:cNvPr id="87" name="Text 84"/>
           <p:cNvSpPr/>
           <p:nvPr/>
         </p:nvSpPr>
@@ -3780,7 +3716,7 @@
       </p:sp>
       <p:sp>
         <p:nvSpPr>
-          <p:cNvPr id="90" name="Shape 87"/>
+          <p:cNvPr id="88" name="Shape 85"/>
           <p:cNvSpPr/>
           <p:nvPr/>
         </p:nvSpPr>
@@ -3800,7 +3736,7 @@
       </p:sp>
       <p:sp>
         <p:nvSpPr>
-          <p:cNvPr id="91" name="Text 88"/>
+          <p:cNvPr id="89" name="Text 86"/>
           <p:cNvSpPr/>
           <p:nvPr/>
         </p:nvSpPr>
@@ -3839,7 +3775,7 @@
       </p:sp>
       <p:sp>
         <p:nvSpPr>
-          <p:cNvPr id="92" name="Text 89"/>
+          <p:cNvPr id="90" name="Text 87"/>
           <p:cNvSpPr/>
           <p:nvPr/>
         </p:nvSpPr>
@@ -3870,7 +3806,7 @@
                 <a:ea typeface="Arial" pitchFamily="34" charset="-122"/>
                 <a:cs typeface="Arial" pitchFamily="34" charset="-120"/>
               </a:rPr>
-              <a:t>each product contributes across multiple strands — columns do not pair one-to-one</a:t>
+              <a:t>each product contributes across multiple pillars — columns do not pair one-to-one</a:t>
             </a:r>
             <a:endParaRPr lang="en-US" sz="720" dirty="0"/>
           </a:p>
@@ -3878,7 +3814,7 @@
       </p:sp>
       <p:sp>
         <p:nvSpPr>
-          <p:cNvPr id="93" name="Shape 90"/>
+          <p:cNvPr id="91" name="Shape 88"/>
           <p:cNvSpPr/>
           <p:nvPr/>
         </p:nvSpPr>
@@ -3903,7 +3839,7 @@
       </p:sp>
       <p:sp>
         <p:nvSpPr>
-          <p:cNvPr id="94" name="Text 91"/>
+          <p:cNvPr id="92" name="Text 89"/>
           <p:cNvSpPr/>
           <p:nvPr/>
         </p:nvSpPr>
@@ -3942,7 +3878,7 @@
       </p:sp>
       <p:sp>
         <p:nvSpPr>
-          <p:cNvPr id="95" name="Shape 92"/>
+          <p:cNvPr id="93" name="Shape 90"/>
           <p:cNvSpPr/>
           <p:nvPr/>
         </p:nvSpPr>
@@ -3967,7 +3903,7 @@
       </p:sp>
       <p:sp>
         <p:nvSpPr>
-          <p:cNvPr id="96" name="Text 93"/>
+          <p:cNvPr id="94" name="Text 91"/>
           <p:cNvSpPr/>
           <p:nvPr/>
         </p:nvSpPr>
@@ -4006,7 +3942,7 @@
       </p:sp>
       <p:sp>
         <p:nvSpPr>
-          <p:cNvPr id="97" name="Shape 94"/>
+          <p:cNvPr id="95" name="Shape 92"/>
           <p:cNvSpPr/>
           <p:nvPr/>
         </p:nvSpPr>
@@ -4031,7 +3967,7 @@
       </p:sp>
       <p:sp>
         <p:nvSpPr>
-          <p:cNvPr id="98" name="Text 95"/>
+          <p:cNvPr id="96" name="Text 93"/>
           <p:cNvSpPr/>
           <p:nvPr/>
         </p:nvSpPr>
@@ -4079,7 +4015,7 @@
                 <a:ea typeface="Arial" pitchFamily="34" charset="-122"/>
                 <a:cs typeface="Arial" pitchFamily="34" charset="-120"/>
               </a:rPr>
-              <a:t>Developmental product — performance-cognition strand</a:t>
+              <a:t>Developmental product — performance-cognition pillar</a:t>
             </a:r>
             <a:endParaRPr lang="en-US" sz="740" dirty="0"/>
           </a:p>
@@ -4087,7 +4023,7 @@
       </p:sp>
       <p:sp>
         <p:nvSpPr>
-          <p:cNvPr id="99" name="Shape 96"/>
+          <p:cNvPr id="97" name="Shape 94"/>
           <p:cNvSpPr/>
           <p:nvPr/>
         </p:nvSpPr>
@@ -4112,7 +4048,7 @@
       </p:sp>
       <p:sp>
         <p:nvSpPr>
-          <p:cNvPr id="100" name="Text 97"/>
+          <p:cNvPr id="98" name="Text 95"/>
           <p:cNvSpPr/>
           <p:nvPr/>
         </p:nvSpPr>
@@ -4151,7 +4087,7 @@
       </p:sp>
       <p:sp>
         <p:nvSpPr>
-          <p:cNvPr id="101" name="Shape 98"/>
+          <p:cNvPr id="99" name="Shape 96"/>
           <p:cNvSpPr/>
           <p:nvPr/>
         </p:nvSpPr>
@@ -4176,7 +4112,7 @@
       </p:sp>
       <p:sp>
         <p:nvSpPr>
-          <p:cNvPr id="102" name="Text 99"/>
+          <p:cNvPr id="100" name="Text 97"/>
           <p:cNvSpPr/>
           <p:nvPr/>
         </p:nvSpPr>
@@ -4215,7 +4151,7 @@
       </p:sp>
       <p:sp>
         <p:nvSpPr>
-          <p:cNvPr id="103" name="Shape 100"/>
+          <p:cNvPr id="101" name="Shape 98"/>
           <p:cNvSpPr/>
           <p:nvPr/>
         </p:nvSpPr>
@@ -4240,7 +4176,7 @@
       </p:sp>
       <p:sp>
         <p:nvSpPr>
-          <p:cNvPr id="104" name="Text 101"/>
+          <p:cNvPr id="102" name="Text 99"/>
           <p:cNvSpPr/>
           <p:nvPr/>
         </p:nvSpPr>
@@ -4279,7 +4215,7 @@
       </p:sp>
       <p:sp>
         <p:nvSpPr>
-          <p:cNvPr id="105" name="Shape 102"/>
+          <p:cNvPr id="103" name="Shape 100"/>
           <p:cNvSpPr/>
           <p:nvPr/>
         </p:nvSpPr>
@@ -4304,7 +4240,7 @@
       </p:sp>
       <p:sp>
         <p:nvSpPr>
-          <p:cNvPr id="106" name="Text 103"/>
+          <p:cNvPr id="104" name="Text 101"/>
           <p:cNvSpPr/>
           <p:nvPr/>
         </p:nvSpPr>
@@ -4343,7 +4279,7 @@
       </p:sp>
       <p:sp>
         <p:nvSpPr>
-          <p:cNvPr id="107" name="Shape 104"/>
+          <p:cNvPr id="105" name="Shape 102"/>
           <p:cNvSpPr/>
           <p:nvPr/>
         </p:nvSpPr>
@@ -4367,7 +4303,7 @@
       </p:sp>
       <p:sp>
         <p:nvSpPr>
-          <p:cNvPr id="108" name="Text 105"/>
+          <p:cNvPr id="106" name="Text 103"/>
           <p:cNvSpPr/>
           <p:nvPr/>
         </p:nvSpPr>
@@ -4398,7 +4334,7 @@
                 <a:ea typeface="Arial" pitchFamily="34" charset="-122"/>
                 <a:cs typeface="Arial" pitchFamily="34" charset="-120"/>
               </a:rPr>
-              <a:t>COGCON MVP is nested within the performance-cognition strand (dashed link). It develops selected elements of Performance Under Pressure — not a complete Combat Mindset programme or a validated operational-readiness measure.</a:t>
+              <a:t>COGCON MVP is nested within the performance-cognition pillar (dashed link). It develops selected elements of Performance Under Pressure — not a complete Combat Mindset programme or a validated operational-readiness measure.</a:t>
             </a:r>
             <a:endParaRPr lang="en-US" sz="680" dirty="0"/>
           </a:p>
@@ -4406,7 +4342,7 @@
       </p:sp>
       <p:sp>
         <p:nvSpPr>
-          <p:cNvPr id="109" name="Text 106"/>
+          <p:cNvPr id="107" name="Text 104"/>
           <p:cNvSpPr/>
           <p:nvPr/>
         </p:nvSpPr>
@@ -4437,7 +4373,7 @@
                 <a:ea typeface="Arial" pitchFamily="34" charset="-122"/>
                 <a:cs typeface="Arial" pitchFamily="34" charset="-120"/>
               </a:rPr>
-              <a:t>Prepare → Perform → Recover   ·   Lead Self → Lead Teams → Lead Leaders → Lead Systems</a:t>
+              <a:t>Prepare ► Perform ► Recover   ·   Lead Self ► Lead Teams ► Lead Leaders ► Lead Systems</a:t>
             </a:r>
             <a:endParaRPr lang="en-US" sz="680" dirty="0"/>
           </a:p>

--- a/output/combat-mindset-onepager.pptx
+++ b/output/combat-mindset-onepager.pptx
@@ -1026,7 +1026,7 @@
                 <a:ea typeface="Arial" pitchFamily="34" charset="-122"/>
                 <a:cs typeface="Arial" pitchFamily="34" charset="-120"/>
               </a:rPr>
-              <a:t>NZALC / Human Performance Cell   ·   NZALC/HPC 2026   ·   Draft v0.4   ·   July 2026</a:t>
+              <a:t>Army Command School   ·   ACS 2026   ·   Draft v0.5   ·   July 2026</a:t>
             </a:r>
             <a:endParaRPr lang="en-US" sz="650" dirty="0"/>
           </a:p>
@@ -1056,17 +1056,6 @@
             <a:pPr algn="r" indent="0" marL="0">
               <a:buNone/>
             </a:pPr>
-            <a:r>
-              <a:rPr lang="en-US" sz="650" dirty="0">
-                <a:solidFill>
-                  <a:srgbClr val="CDD2B7"/>
-                </a:solidFill>
-                <a:latin typeface="Arial" pitchFamily="34" charset="0"/>
-                <a:ea typeface="Arial" pitchFamily="34" charset="-122"/>
-                <a:cs typeface="Arial" pitchFamily="34" charset="-120"/>
-              </a:rPr>
-              <a:t>Distribution: COMDT ACS</a:t>
-            </a:r>
             <a:endParaRPr lang="en-US" sz="650" dirty="0"/>
           </a:p>
         </p:txBody>

--- a/output/combat-mindset-onepager.pptx
+++ b/output/combat-mindset-onepager.pptx
@@ -1234,7 +1234,7 @@
                 <a:ea typeface="Arial" pitchFamily="34" charset="-122"/>
                 <a:cs typeface="Arial" pitchFamily="34" charset="-120"/>
               </a:rPr>
-              <a:t>Proposed Warfighter Focus line — subject to sponsor endorsement</a:t>
+              <a:t>Proposed Warfighter Focus tagline — subject to sponsor endorsement</a:t>
             </a:r>
             <a:endParaRPr lang="en-US" sz="750" dirty="0"/>
           </a:p>

--- a/output/combat-mindset-onepager.pptx
+++ b/output/combat-mindset-onepager.pptx
@@ -1026,7 +1026,7 @@
                 <a:ea typeface="Arial" pitchFamily="34" charset="-122"/>
                 <a:cs typeface="Arial" pitchFamily="34" charset="-120"/>
               </a:rPr>
-              <a:t>Army Command School   ·   ACS 2026   ·   Draft v0.5   ·   July 2026</a:t>
+              <a:t>Army Command School   ·   ACS 2026   ·   Draft v0.7   ·   July 2026</a:t>
             </a:r>
             <a:endParaRPr lang="en-US" sz="650" dirty="0"/>
           </a:p>
@@ -2195,7 +2195,7 @@
                 <a:ea typeface="Arial" pitchFamily="34" charset="-122"/>
                 <a:cs typeface="Arial" pitchFamily="34" charset="-120"/>
               </a:rPr>
-              <a:t>Organises:  definitions  ·  desired outcomes  ·  capability pillars  ·  developmental progression  ·  products and methods  ·  delivery  ·  governance  ·  evidence  ·  assurance</a:t>
+              <a:t>Organises:  definitions  ·  desired outcomes  ·  provisional pillars  ·  developmental progression  ·  products and methods  ·  delivery  ·  governance  ·  evidence  ·  assurance</a:t>
             </a:r>
             <a:endParaRPr lang="en-US" sz="750" dirty="0"/>
           </a:p>
@@ -2497,7 +2497,7 @@
                 <a:ea typeface="Arial" pitchFamily="34" charset="-122"/>
                 <a:cs typeface="Arial" pitchFamily="34" charset="-120"/>
               </a:rPr>
-              <a:t>  —  Framework development and delivery coordination</a:t>
+              <a:t>  —  Framework development and capability-integration lead</a:t>
             </a:r>
             <a:endParaRPr lang="en-US" sz="800" dirty="0"/>
           </a:p>
@@ -2911,7 +2911,7 @@
                 <a:ea typeface="Arial" pitchFamily="34" charset="-122"/>
                 <a:cs typeface="Arial" pitchFamily="34" charset="-120"/>
               </a:rPr>
-              <a:t>MAP</a:t>
+              <a:t>STOCKTAKE</a:t>
             </a:r>
             <a:endParaRPr lang="en-US" sz="680" dirty="0"/>
           </a:p>
@@ -3127,7 +3127,7 @@
                 <a:ea typeface="Arial" pitchFamily="34" charset="-122"/>
                 <a:cs typeface="Arial" pitchFamily="34" charset="-120"/>
               </a:rPr>
-              <a:t>COGCON’s completed feasibility trials enter Phase 1 as mapped evidence. Report back November 2026: Framework v1.0, capability and product map, implementation plan.</a:t>
+              <a:t>COGCON’s completed feasibility trials enter the Phase 1 stocktake as evidence. Report back November 2026: Framework v1.0, capability and product architecture, implementation plan.</a:t>
             </a:r>
             <a:endParaRPr lang="en-US" sz="730" dirty="0"/>
           </a:p>
@@ -3260,7 +3260,7 @@
         <p:spPr>
           <a:xfrm>
             <a:off x="521208" y="5138928"/>
-            <a:ext cx="11155680" cy="182880"/>
+            <a:ext cx="5943600" cy="182880"/>
           </a:xfrm>
           <a:prstGeom prst="rect">
             <a:avLst/>
@@ -3284,7 +3284,7 @@
                 <a:ea typeface="Arial" pitchFamily="34" charset="-122"/>
                 <a:cs typeface="Arial" pitchFamily="34" charset="-120"/>
               </a:rPr>
-              <a:t>CAPABILITY PILLARS — WHAT WE BUILD</a:t>
+              <a:t>PROVISIONAL CAPABILITY PILLARS — WHAT WE BUILD</a:t>
             </a:r>
             <a:endParaRPr lang="en-US" sz="850" dirty="0"/>
           </a:p>
@@ -3292,7 +3292,46 @@
       </p:sp>
       <p:sp>
         <p:nvSpPr>
-          <p:cNvPr id="74" name="Shape 71"/>
+          <p:cNvPr id="74" name="Text 71"/>
+          <p:cNvSpPr/>
+          <p:nvPr/>
+        </p:nvSpPr>
+        <p:spPr>
+          <a:xfrm>
+            <a:off x="6446520" y="5138928"/>
+            <a:ext cx="5230368" cy="182880"/>
+          </a:xfrm>
+          <a:prstGeom prst="rect">
+            <a:avLst/>
+          </a:prstGeom>
+          <a:noFill/>
+          <a:ln/>
+        </p:spPr>
+        <p:txBody>
+          <a:bodyPr wrap="square" lIns="0" tIns="0" rIns="0" bIns="0" rtlCol="0" anchor="ctr"/>
+          <a:lstStyle/>
+          <a:p>
+            <a:pPr algn="r" indent="0" marL="0">
+              <a:buNone/>
+            </a:pPr>
+            <a:r>
+              <a:rPr lang="en-US" sz="720" i="1" dirty="0">
+                <a:solidFill>
+                  <a:srgbClr val="CDD2B7"/>
+                </a:solidFill>
+                <a:latin typeface="Arial" pitchFamily="34" charset="0"/>
+                <a:ea typeface="Arial" pitchFamily="34" charset="-122"/>
+                <a:cs typeface="Arial" pitchFamily="34" charset="-120"/>
+              </a:rPr>
+              <a:t>provisional working pillars — subject to Phase 1 validation</a:t>
+            </a:r>
+            <a:endParaRPr lang="en-US" sz="720" dirty="0"/>
+          </a:p>
+        </p:txBody>
+      </p:sp>
+      <p:sp>
+        <p:nvSpPr>
+          <p:cNvPr id="75" name="Shape 72"/>
           <p:cNvSpPr/>
           <p:nvPr/>
         </p:nvSpPr>
@@ -3312,7 +3351,7 @@
       </p:sp>
       <p:sp>
         <p:nvSpPr>
-          <p:cNvPr id="75" name="Text 72"/>
+          <p:cNvPr id="76" name="Text 73"/>
           <p:cNvSpPr/>
           <p:nvPr/>
         </p:nvSpPr>
@@ -3351,7 +3390,7 @@
       </p:sp>
       <p:sp>
         <p:nvSpPr>
-          <p:cNvPr id="76" name="Shape 73"/>
+          <p:cNvPr id="77" name="Shape 74"/>
           <p:cNvSpPr/>
           <p:nvPr/>
         </p:nvSpPr>
@@ -3371,7 +3410,7 @@
       </p:sp>
       <p:sp>
         <p:nvSpPr>
-          <p:cNvPr id="77" name="Text 74"/>
+          <p:cNvPr id="78" name="Text 75"/>
           <p:cNvSpPr/>
           <p:nvPr/>
         </p:nvSpPr>
@@ -3402,7 +3441,7 @@
                 <a:ea typeface="Arial" pitchFamily="34" charset="-122"/>
                 <a:cs typeface="Arial" pitchFamily="34" charset="-120"/>
               </a:rPr>
-              <a:t>Mental skills</a:t>
+              <a:t>Self-regulation</a:t>
             </a:r>
             <a:endParaRPr lang="en-US" sz="760" dirty="0"/>
           </a:p>
@@ -3410,7 +3449,7 @@
       </p:sp>
       <p:sp>
         <p:nvSpPr>
-          <p:cNvPr id="78" name="Shape 75"/>
+          <p:cNvPr id="79" name="Shape 76"/>
           <p:cNvSpPr/>
           <p:nvPr/>
         </p:nvSpPr>
@@ -3430,7 +3469,7 @@
       </p:sp>
       <p:sp>
         <p:nvSpPr>
-          <p:cNvPr id="79" name="Text 76"/>
+          <p:cNvPr id="80" name="Text 77"/>
           <p:cNvSpPr/>
           <p:nvPr/>
         </p:nvSpPr>
@@ -3469,7 +3508,7 @@
       </p:sp>
       <p:sp>
         <p:nvSpPr>
-          <p:cNvPr id="80" name="Shape 77"/>
+          <p:cNvPr id="81" name="Shape 78"/>
           <p:cNvSpPr/>
           <p:nvPr/>
         </p:nvSpPr>
@@ -3489,7 +3528,7 @@
       </p:sp>
       <p:sp>
         <p:nvSpPr>
-          <p:cNvPr id="81" name="Text 78"/>
+          <p:cNvPr id="82" name="Text 79"/>
           <p:cNvSpPr/>
           <p:nvPr/>
         </p:nvSpPr>
@@ -3528,7 +3567,7 @@
       </p:sp>
       <p:sp>
         <p:nvSpPr>
-          <p:cNvPr id="82" name="Shape 79"/>
+          <p:cNvPr id="83" name="Shape 80"/>
           <p:cNvSpPr/>
           <p:nvPr/>
         </p:nvSpPr>
@@ -3548,7 +3587,7 @@
       </p:sp>
       <p:sp>
         <p:nvSpPr>
-          <p:cNvPr id="83" name="Text 80"/>
+          <p:cNvPr id="84" name="Text 81"/>
           <p:cNvSpPr/>
           <p:nvPr/>
         </p:nvSpPr>
@@ -3587,7 +3626,7 @@
       </p:sp>
       <p:sp>
         <p:nvSpPr>
-          <p:cNvPr id="84" name="Shape 81"/>
+          <p:cNvPr id="85" name="Shape 82"/>
           <p:cNvSpPr/>
           <p:nvPr/>
         </p:nvSpPr>
@@ -3607,7 +3646,7 @@
       </p:sp>
       <p:sp>
         <p:nvSpPr>
-          <p:cNvPr id="85" name="Text 82"/>
+          <p:cNvPr id="86" name="Text 83"/>
           <p:cNvSpPr/>
           <p:nvPr/>
         </p:nvSpPr>
@@ -3638,7 +3677,7 @@
                 <a:ea typeface="Arial" pitchFamily="34" charset="-122"/>
                 <a:cs typeface="Arial" pitchFamily="34" charset="-120"/>
               </a:rPr>
-              <a:t>Professional identity &amp; values</a:t>
+              <a:t>Identity, values &amp; will</a:t>
             </a:r>
             <a:endParaRPr lang="en-US" sz="760" dirty="0"/>
           </a:p>
@@ -3646,7 +3685,7 @@
       </p:sp>
       <p:sp>
         <p:nvSpPr>
-          <p:cNvPr id="86" name="Shape 83"/>
+          <p:cNvPr id="87" name="Shape 84"/>
           <p:cNvSpPr/>
           <p:nvPr/>
         </p:nvSpPr>
@@ -3666,7 +3705,7 @@
       </p:sp>
       <p:sp>
         <p:nvSpPr>
-          <p:cNvPr id="87" name="Text 84"/>
+          <p:cNvPr id="88" name="Text 85"/>
           <p:cNvSpPr/>
           <p:nvPr/>
         </p:nvSpPr>
@@ -3697,7 +3736,7 @@
                 <a:ea typeface="Arial" pitchFamily="34" charset="-122"/>
                 <a:cs typeface="Arial" pitchFamily="34" charset="-120"/>
               </a:rPr>
-              <a:t>Individual &amp; collective exposure to pressure</a:t>
+              <a:t>Collective performance</a:t>
             </a:r>
             <a:endParaRPr lang="en-US" sz="760" dirty="0"/>
           </a:p>
@@ -3705,7 +3744,7 @@
       </p:sp>
       <p:sp>
         <p:nvSpPr>
-          <p:cNvPr id="88" name="Shape 85"/>
+          <p:cNvPr id="89" name="Shape 86"/>
           <p:cNvSpPr/>
           <p:nvPr/>
         </p:nvSpPr>
@@ -3725,7 +3764,7 @@
       </p:sp>
       <p:sp>
         <p:nvSpPr>
-          <p:cNvPr id="89" name="Text 86"/>
+          <p:cNvPr id="90" name="Text 87"/>
           <p:cNvSpPr/>
           <p:nvPr/>
         </p:nvSpPr>
@@ -3764,7 +3803,7 @@
       </p:sp>
       <p:sp>
         <p:nvSpPr>
-          <p:cNvPr id="90" name="Text 87"/>
+          <p:cNvPr id="91" name="Text 88"/>
           <p:cNvSpPr/>
           <p:nvPr/>
         </p:nvSpPr>
@@ -3803,7 +3842,7 @@
       </p:sp>
       <p:sp>
         <p:nvSpPr>
-          <p:cNvPr id="91" name="Shape 88"/>
+          <p:cNvPr id="92" name="Shape 89"/>
           <p:cNvSpPr/>
           <p:nvPr/>
         </p:nvSpPr>
@@ -3828,7 +3867,7 @@
       </p:sp>
       <p:sp>
         <p:nvSpPr>
-          <p:cNvPr id="92" name="Text 89"/>
+          <p:cNvPr id="93" name="Text 90"/>
           <p:cNvSpPr/>
           <p:nvPr/>
         </p:nvSpPr>
@@ -3867,7 +3906,7 @@
       </p:sp>
       <p:sp>
         <p:nvSpPr>
-          <p:cNvPr id="93" name="Shape 90"/>
+          <p:cNvPr id="94" name="Shape 91"/>
           <p:cNvSpPr/>
           <p:nvPr/>
         </p:nvSpPr>
@@ -3892,7 +3931,7 @@
       </p:sp>
       <p:sp>
         <p:nvSpPr>
-          <p:cNvPr id="94" name="Text 91"/>
+          <p:cNvPr id="95" name="Text 92"/>
           <p:cNvSpPr/>
           <p:nvPr/>
         </p:nvSpPr>
@@ -3931,7 +3970,7 @@
       </p:sp>
       <p:sp>
         <p:nvSpPr>
-          <p:cNvPr id="95" name="Shape 92"/>
+          <p:cNvPr id="96" name="Shape 93"/>
           <p:cNvSpPr/>
           <p:nvPr/>
         </p:nvSpPr>
@@ -3956,7 +3995,7 @@
       </p:sp>
       <p:sp>
         <p:nvSpPr>
-          <p:cNvPr id="96" name="Text 93"/>
+          <p:cNvPr id="97" name="Text 94"/>
           <p:cNvSpPr/>
           <p:nvPr/>
         </p:nvSpPr>
@@ -3987,7 +4026,7 @@
                 <a:ea typeface="Arial" pitchFamily="34" charset="-122"/>
                 <a:cs typeface="Arial" pitchFamily="34" charset="-120"/>
               </a:rPr>
-              <a:t>COGCON MVP</a:t>
+              <a:t>COGCON</a:t>
             </a:r>
             <a:endParaRPr lang="en-US" sz="740" dirty="0"/>
           </a:p>
@@ -4004,7 +4043,7 @@
                 <a:ea typeface="Arial" pitchFamily="34" charset="-122"/>
                 <a:cs typeface="Arial" pitchFamily="34" charset="-120"/>
               </a:rPr>
-              <a:t>Developmental product — performance-cognition pillar</a:t>
+              <a:t>Developmental performance-cognition product</a:t>
             </a:r>
             <a:endParaRPr lang="en-US" sz="740" dirty="0"/>
           </a:p>
@@ -4012,7 +4051,7 @@
       </p:sp>
       <p:sp>
         <p:nvSpPr>
-          <p:cNvPr id="97" name="Shape 94"/>
+          <p:cNvPr id="98" name="Shape 95"/>
           <p:cNvSpPr/>
           <p:nvPr/>
         </p:nvSpPr>
@@ -4037,7 +4076,7 @@
       </p:sp>
       <p:sp>
         <p:nvSpPr>
-          <p:cNvPr id="98" name="Text 95"/>
+          <p:cNvPr id="99" name="Text 96"/>
           <p:cNvSpPr/>
           <p:nvPr/>
         </p:nvSpPr>
@@ -4068,7 +4107,7 @@
                 <a:ea typeface="Arial" pitchFamily="34" charset="-122"/>
                 <a:cs typeface="Arial" pitchFamily="34" charset="-120"/>
               </a:rPr>
-              <a:t>Scenario &amp; experiential training</a:t>
+              <a:t>Scenario, experiential &amp; progressive pressure training</a:t>
             </a:r>
             <a:endParaRPr lang="en-US" sz="740" dirty="0"/>
           </a:p>
@@ -4076,7 +4115,7 @@
       </p:sp>
       <p:sp>
         <p:nvSpPr>
-          <p:cNvPr id="99" name="Shape 96"/>
+          <p:cNvPr id="100" name="Shape 97"/>
           <p:cNvSpPr/>
           <p:nvPr/>
         </p:nvSpPr>
@@ -4101,7 +4140,7 @@
       </p:sp>
       <p:sp>
         <p:nvSpPr>
-          <p:cNvPr id="100" name="Text 97"/>
+          <p:cNvPr id="101" name="Text 98"/>
           <p:cNvSpPr/>
           <p:nvPr/>
         </p:nvSpPr>
@@ -4132,7 +4171,7 @@
                 <a:ea typeface="Arial" pitchFamily="34" charset="-122"/>
                 <a:cs typeface="Arial" pitchFamily="34" charset="-120"/>
               </a:rPr>
-              <a:t>Physical conditioning</a:t>
+              <a:t>Physical &amp; cognitive conditioning</a:t>
             </a:r>
             <a:endParaRPr lang="en-US" sz="740" dirty="0"/>
           </a:p>
@@ -4140,7 +4179,7 @@
       </p:sp>
       <p:sp>
         <p:nvSpPr>
-          <p:cNvPr id="101" name="Shape 98"/>
+          <p:cNvPr id="102" name="Shape 99"/>
           <p:cNvSpPr/>
           <p:nvPr/>
         </p:nvSpPr>
@@ -4165,7 +4204,7 @@
       </p:sp>
       <p:sp>
         <p:nvSpPr>
-          <p:cNvPr id="102" name="Text 99"/>
+          <p:cNvPr id="103" name="Text 100"/>
           <p:cNvSpPr/>
           <p:nvPr/>
         </p:nvSpPr>
@@ -4204,7 +4243,7 @@
       </p:sp>
       <p:sp>
         <p:nvSpPr>
-          <p:cNvPr id="103" name="Shape 100"/>
+          <p:cNvPr id="104" name="Shape 101"/>
           <p:cNvSpPr/>
           <p:nvPr/>
         </p:nvSpPr>
@@ -4229,7 +4268,7 @@
       </p:sp>
       <p:sp>
         <p:nvSpPr>
-          <p:cNvPr id="104" name="Text 101"/>
+          <p:cNvPr id="105" name="Text 102"/>
           <p:cNvSpPr/>
           <p:nvPr/>
         </p:nvSpPr>
@@ -4260,7 +4299,7 @@
                 <a:ea typeface="Arial" pitchFamily="34" charset="-122"/>
                 <a:cs typeface="Arial" pitchFamily="34" charset="-120"/>
               </a:rPr>
-              <a:t>Other products identified in Phase 1 mapping</a:t>
+              <a:t>Other products identified in Phase 1 stocktake</a:t>
             </a:r>
             <a:endParaRPr lang="en-US" sz="740" dirty="0"/>
           </a:p>
@@ -4268,7 +4307,7 @@
       </p:sp>
       <p:sp>
         <p:nvSpPr>
-          <p:cNvPr id="105" name="Shape 102"/>
+          <p:cNvPr id="106" name="Shape 103"/>
           <p:cNvSpPr/>
           <p:nvPr/>
         </p:nvSpPr>
@@ -4292,7 +4331,7 @@
       </p:sp>
       <p:sp>
         <p:nvSpPr>
-          <p:cNvPr id="106" name="Text 103"/>
+          <p:cNvPr id="107" name="Text 104"/>
           <p:cNvSpPr/>
           <p:nvPr/>
         </p:nvSpPr>
@@ -4323,7 +4362,7 @@
                 <a:ea typeface="Arial" pitchFamily="34" charset="-122"/>
                 <a:cs typeface="Arial" pitchFamily="34" charset="-120"/>
               </a:rPr>
-              <a:t>COGCON MVP is nested within the performance-cognition pillar (dashed link). It develops selected elements of Performance Under Pressure — not a complete Combat Mindset programme or a validated operational-readiness measure.</a:t>
+              <a:t>COGCON is nested within the performance-cognition pillar (dashed link) as one developmental product. Its status and appropriate future role will be confirmed through the Phase 1 stocktake.</a:t>
             </a:r>
             <a:endParaRPr lang="en-US" sz="680" dirty="0"/>
           </a:p>
@@ -4331,7 +4370,7 @@
       </p:sp>
       <p:sp>
         <p:nvSpPr>
-          <p:cNvPr id="107" name="Text 104"/>
+          <p:cNvPr id="108" name="Text 105"/>
           <p:cNvSpPr/>
           <p:nvPr/>
         </p:nvSpPr>

--- a/output/combat-mindset-onepager.pptx
+++ b/output/combat-mindset-onepager.pptx
@@ -1026,7 +1026,7 @@
                 <a:ea typeface="Arial" pitchFamily="34" charset="-122"/>
                 <a:cs typeface="Arial" pitchFamily="34" charset="-120"/>
               </a:rPr>
-              <a:t>Army Command School   ·   ACS 2026   ·   Draft v0.7   ·   July 2026</a:t>
+              <a:t>Army Command School   ·   ACS 2026   ·   Draft v0.8   ·   July 2026</a:t>
             </a:r>
             <a:endParaRPr lang="en-US" sz="650" dirty="0"/>
           </a:p>
@@ -1489,7 +1489,7 @@
                 <a:ea typeface="Arial" pitchFamily="34" charset="-122"/>
                 <a:cs typeface="Arial" pitchFamily="34" charset="-120"/>
               </a:rPr>
-              <a:t>The individual and collective readiness and disposition to remain effective and act decisively, persistently, adaptively and ethically under the threat, adversity and uncertainty of combat in order to achieve the mission.</a:t>
+              <a:t>The individual and collective readiness and disposition to remain effective and act decisively and ethically under the threat, adversity and uncertainty of combat in order to achieve the mission.</a:t>
             </a:r>
             <a:endParaRPr lang="en-US" sz="900" dirty="0"/>
           </a:p>
@@ -2391,7 +2391,7 @@
                 <a:ea typeface="Arial" pitchFamily="34" charset="-122"/>
                 <a:cs typeface="Arial" pitchFamily="34" charset="-120"/>
               </a:rPr>
-              <a:t>  —  Strategic sponsorship and policy direction</a:t>
+              <a:t>  —  Strategic sponsorship and policy direction (to be confirmed)</a:t>
             </a:r>
             <a:endParaRPr lang="en-US" sz="800" dirty="0"/>
           </a:p>
